--- a/images/meilahti.pptx
+++ b/images/meilahti.pptx
@@ -104,6 +104,11 @@
       </a:defRPr>
     </a:lvl9pPr>
   </p:defaultTextStyle>
+  <p:extLst>
+    <p:ext uri="{EFAFB233-063F-42B5-8137-9DF3F51BA10A}">
+      <p15:sldGuideLst xmlns:p15="http://schemas.microsoft.com/office/powerpoint/2012/main"/>
+    </p:ext>
+  </p:extLst>
 </p:presentation>
 </file>
 
@@ -3386,23 +3391,19 @@
         </p:nvSpPr>
         <p:spPr>
           <a:xfrm>
-            <a:off x="8186738" y="4843463"/>
-            <a:ext cx="1700212" cy="914400"/>
+            <a:off x="7840747" y="4583971"/>
+            <a:ext cx="2044657" cy="1285488"/>
           </a:xfrm>
           <a:prstGeom prst="rect">
             <a:avLst/>
           </a:prstGeom>
           <a:solidFill>
-            <a:schemeClr val="accent1">
-              <a:lumMod val="40000"/>
-              <a:lumOff val="60000"/>
-              <a:alpha val="50196"/>
-            </a:schemeClr>
+            <a:srgbClr val="00B0F0">
+              <a:alpha val="25098"/>
+            </a:srgbClr>
           </a:solidFill>
           <a:ln>
-            <a:solidFill>
-              <a:schemeClr val="tx1"/>
-            </a:solidFill>
+            <a:noFill/>
             <a:prstDash val="dash"/>
           </a:ln>
         </p:spPr>
@@ -3423,7 +3424,7 @@
           </a:fontRef>
         </p:style>
         <p:txBody>
-          <a:bodyPr rtlCol="0" anchor="ctr"/>
+          <a:bodyPr rtlCol="0" anchor="t"/>
           <a:lstStyle/>
           <a:p>
             <a:pPr algn="ctr"/>
@@ -3432,6 +3433,9 @@
                 <a:solidFill>
                   <a:schemeClr val="tx1"/>
                 </a:solidFill>
+                <a:highlight>
+                  <a:srgbClr val="C0C0C0"/>
+                </a:highlight>
               </a:rPr>
               <a:t>HUSLAB</a:t>
             </a:r>
@@ -3452,23 +3456,19 @@
         </p:nvSpPr>
         <p:spPr>
           <a:xfrm>
-            <a:off x="7753922" y="3209926"/>
-            <a:ext cx="1402270" cy="914400"/>
+            <a:off x="7753921" y="3209925"/>
+            <a:ext cx="1698997" cy="1176723"/>
           </a:xfrm>
           <a:prstGeom prst="rect">
             <a:avLst/>
           </a:prstGeom>
           <a:solidFill>
-            <a:schemeClr val="accent6">
-              <a:lumMod val="40000"/>
-              <a:lumOff val="60000"/>
-              <a:alpha val="50196"/>
-            </a:schemeClr>
+            <a:srgbClr val="FF0000">
+              <a:alpha val="25098"/>
+            </a:srgbClr>
           </a:solidFill>
           <a:ln>
-            <a:solidFill>
-              <a:schemeClr val="tx1"/>
-            </a:solidFill>
+            <a:noFill/>
             <a:prstDash val="dash"/>
           </a:ln>
         </p:spPr>
@@ -3489,7 +3489,7 @@
           </a:fontRef>
         </p:style>
         <p:txBody>
-          <a:bodyPr rtlCol="0" anchor="ctr"/>
+          <a:bodyPr rtlCol="0" anchor="t"/>
           <a:lstStyle/>
           <a:p>
             <a:pPr algn="ctr"/>
@@ -3498,6 +3498,9 @@
                 <a:solidFill>
                   <a:schemeClr val="tx1"/>
                 </a:solidFill>
+                <a:highlight>
+                  <a:srgbClr val="C0C0C0"/>
+                </a:highlight>
               </a:rPr>
               <a:t>Biomedicum</a:t>
             </a:r>
@@ -3526,15 +3529,13 @@
           </a:prstGeom>
           <a:solidFill>
             <a:schemeClr val="accent4">
-              <a:lumMod val="40000"/>
-              <a:lumOff val="60000"/>
-              <a:alpha val="50196"/>
+              <a:lumMod val="60000"/>
+              <a:lumOff val="40000"/>
+              <a:alpha val="25098"/>
             </a:schemeClr>
           </a:solidFill>
           <a:ln>
-            <a:solidFill>
-              <a:schemeClr val="tx1"/>
-            </a:solidFill>
+            <a:noFill/>
             <a:prstDash val="dash"/>
           </a:ln>
         </p:spPr>
@@ -3555,7 +3556,7 @@
           </a:fontRef>
         </p:style>
         <p:txBody>
-          <a:bodyPr rtlCol="0" anchor="ctr"/>
+          <a:bodyPr rtlCol="0" anchor="t"/>
           <a:lstStyle/>
           <a:p>
             <a:pPr algn="ctr"/>
@@ -3564,6 +3565,9 @@
                 <a:solidFill>
                   <a:schemeClr val="tx1"/>
                 </a:solidFill>
+                <a:highlight>
+                  <a:srgbClr val="C0C0C0"/>
+                </a:highlight>
               </a:rPr>
               <a:t>Helsinki  University Hospital</a:t>
             </a:r>
